--- a/reports/genpet/2026-10/Genpet_Monthly_Optimization_Report_October_2026_v2.pptx
+++ b/reports/genpet/2026-10/Genpet_Monthly_Optimization_Report_October_2026_v2.pptx
@@ -6561,7 +6561,7 @@
                 <a:ea typeface="Plus Jakarta Sans" pitchFamily="34" charset="-122"/>
                 <a:cs typeface="Plus Jakarta Sans" pitchFamily="34" charset="-120"/>
               </a:rPr>
-              <a:t>✔ Zero horizontal document overflows (`scrollWidth &gt; innerWidth`)</a:t>
+              <a:t>✓ Zero horizontal document overflows (`scrollWidth &gt; innerWidth`)</a:t>
             </a:r>
             <a:endParaRPr lang="en-US" sz="1300" dirty="0"/>
           </a:p>
@@ -6581,7 +6581,7 @@
                 <a:ea typeface="Plus Jakarta Sans" pitchFamily="34" charset="-122"/>
                 <a:cs typeface="Plus Jakarta Sans" pitchFamily="34" charset="-120"/>
               </a:rPr>
-              <a:t>✔ No content clipping or overlapping components</a:t>
+              <a:t>✓ No content clipping or overlapping components</a:t>
             </a:r>
             <a:endParaRPr lang="en-US" sz="1300" dirty="0"/>
           </a:p>
@@ -6601,7 +6601,7 @@
                 <a:ea typeface="Plus Jakarta Sans" pitchFamily="34" charset="-122"/>
                 <a:cs typeface="Plus Jakarta Sans" pitchFamily="34" charset="-120"/>
               </a:rPr>
-              <a:t>✔ Fluid layout scaling across all viewports</a:t>
+              <a:t>✓ Fluid layout scaling across all viewports</a:t>
             </a:r>
             <a:endParaRPr lang="en-US" sz="1300" dirty="0"/>
           </a:p>
@@ -8699,7 +8699,7 @@
                 <a:ea typeface="Plus Jakarta Sans" pitchFamily="34" charset="-122"/>
                 <a:cs typeface="Plus Jakarta Sans" pitchFamily="34" charset="-120"/>
               </a:rPr>
-              <a:t>✔</a:t>
+              <a:t>✓</a:t>
             </a:r>
             <a:endParaRPr lang="en-US" sz="1800" dirty="0"/>
           </a:p>
@@ -9914,7 +9914,7 @@
                 <a:ea typeface="Plus Jakarta Sans" pitchFamily="34" charset="-122"/>
                 <a:cs typeface="Plus Jakarta Sans" pitchFamily="34" charset="-120"/>
               </a:rPr>
-              <a:t>✔ Database Backup:</a:t>
+              <a:t>✓ Database Backup:</a:t>
             </a:r>
             <a:endParaRPr lang="en-US" sz="1300" dirty="0"/>
           </a:p>
@@ -9983,7 +9983,7 @@
                 <a:ea typeface="Plus Jakarta Sans" pitchFamily="34" charset="-122"/>
                 <a:cs typeface="Plus Jakarta Sans" pitchFamily="34" charset="-120"/>
               </a:rPr>
-              <a:t>✔ Source Code &amp; Theme Backup:</a:t>
+              <a:t>✓ Source Code &amp; Theme Backup:</a:t>
             </a:r>
             <a:endParaRPr lang="en-US" sz="1300" dirty="0"/>
           </a:p>
@@ -11426,7 +11426,7 @@
                 <a:ea typeface="Outfit" pitchFamily="34" charset="-122"/>
                 <a:cs typeface="Outfit" pitchFamily="34" charset="-120"/>
               </a:rPr>
-              <a:t>✔ Accessibility: 91 / 100</a:t>
+              <a:t>✓ Accessibility: 91 / 100</a:t>
             </a:r>
             <a:endParaRPr lang="en-US" sz="1800" dirty="0"/>
           </a:p>
@@ -11465,7 +11465,7 @@
                 <a:ea typeface="Outfit" pitchFamily="34" charset="-122"/>
                 <a:cs typeface="Outfit" pitchFamily="34" charset="-120"/>
               </a:rPr>
-              <a:t>✔ Best Practices: 100 / 100</a:t>
+              <a:t>✓ Best Practices: 100 / 100</a:t>
             </a:r>
             <a:endParaRPr lang="en-US" sz="1800" dirty="0"/>
           </a:p>
@@ -11504,7 +11504,7 @@
                 <a:ea typeface="Outfit" pitchFamily="34" charset="-122"/>
                 <a:cs typeface="Outfit" pitchFamily="34" charset="-120"/>
               </a:rPr>
-              <a:t>✔ SEO Rating: 100 / 100</a:t>
+              <a:t>✓ SEO Rating: 100 / 100</a:t>
             </a:r>
             <a:endParaRPr lang="en-US" sz="1800" dirty="0"/>
           </a:p>
@@ -11543,7 +11543,7 @@
                 <a:ea typeface="Outfit" pitchFamily="34" charset="-122"/>
                 <a:cs typeface="Outfit" pitchFamily="34" charset="-120"/>
               </a:rPr>
-              <a:t>✔ Google Agentic Browsing: Pass (2/2)</a:t>
+              <a:t>✓ Google Agentic Browsing: Pass (2/2)</a:t>
             </a:r>
             <a:endParaRPr lang="en-US" sz="1600" dirty="0"/>
           </a:p>
@@ -11965,7 +11965,7 @@
                 <a:ea typeface="Outfit" pitchFamily="34" charset="-122"/>
                 <a:cs typeface="Outfit" pitchFamily="34" charset="-120"/>
               </a:rPr>
-              <a:t>✔ Accessibility: 91 / 100</a:t>
+              <a:t>✓ Accessibility: 91 / 100</a:t>
             </a:r>
             <a:endParaRPr lang="en-US" sz="1800" dirty="0"/>
           </a:p>
@@ -12004,7 +12004,7 @@
                 <a:ea typeface="Outfit" pitchFamily="34" charset="-122"/>
                 <a:cs typeface="Outfit" pitchFamily="34" charset="-120"/>
               </a:rPr>
-              <a:t>✔ Best Practices: 100 / 100</a:t>
+              <a:t>✓ Best Practices: 100 / 100</a:t>
             </a:r>
             <a:endParaRPr lang="en-US" sz="1800" dirty="0"/>
           </a:p>
@@ -12043,7 +12043,7 @@
                 <a:ea typeface="Outfit" pitchFamily="34" charset="-122"/>
                 <a:cs typeface="Outfit" pitchFamily="34" charset="-120"/>
               </a:rPr>
-              <a:t>✔ SEO Rating: 100 / 100</a:t>
+              <a:t>✓ SEO Rating: 100 / 100</a:t>
             </a:r>
             <a:endParaRPr lang="en-US" sz="1800" dirty="0"/>
           </a:p>
@@ -12546,7 +12546,7 @@
                 <a:ea typeface="Outfit" pitchFamily="34" charset="-122"/>
                 <a:cs typeface="Outfit" pitchFamily="34" charset="-120"/>
               </a:rPr>
-              <a:t>✔ Accessibility: 96 / 100</a:t>
+              <a:t>✓ Accessibility: 96 / 100</a:t>
             </a:r>
             <a:endParaRPr lang="en-US" sz="1400" dirty="0"/>
           </a:p>
@@ -12566,7 +12566,7 @@
                 <a:ea typeface="Outfit" pitchFamily="34" charset="-122"/>
                 <a:cs typeface="Outfit" pitchFamily="34" charset="-120"/>
               </a:rPr>
-              <a:t>✔ Best Practices: 100 / 100</a:t>
+              <a:t>✓ Best Practices: 100 / 100</a:t>
             </a:r>
             <a:endParaRPr lang="en-US" sz="1400" dirty="0"/>
           </a:p>
@@ -12586,7 +12586,7 @@
                 <a:ea typeface="Outfit" pitchFamily="34" charset="-122"/>
                 <a:cs typeface="Outfit" pitchFamily="34" charset="-120"/>
               </a:rPr>
-              <a:t>✔ SEO Rating: 100 / 100</a:t>
+              <a:t>✓ SEO Rating: 100 / 100</a:t>
             </a:r>
             <a:endParaRPr lang="en-US" sz="1400" dirty="0"/>
           </a:p>
@@ -12867,7 +12867,7 @@
                 <a:ea typeface="Plus Jakarta Sans" pitchFamily="34" charset="-122"/>
                 <a:cs typeface="Plus Jakarta Sans" pitchFamily="34" charset="-120"/>
               </a:rPr>
-              <a:t>✔ Title Tags: Present across all template layouts</a:t>
+              <a:t>✓ Title Tags: Present across all template layouts</a:t>
             </a:r>
             <a:endParaRPr lang="en-US" sz="1300" dirty="0"/>
           </a:p>
@@ -12887,7 +12887,7 @@
                 <a:ea typeface="Plus Jakarta Sans" pitchFamily="34" charset="-122"/>
                 <a:cs typeface="Plus Jakarta Sans" pitchFamily="34" charset="-120"/>
               </a:rPr>
-              <a:t>✔ Meta Descriptions: Unique descriptions configured</a:t>
+              <a:t>✓ Meta Descriptions: Unique descriptions configured</a:t>
             </a:r>
             <a:endParaRPr lang="en-US" sz="1300" dirty="0"/>
           </a:p>
@@ -12907,7 +12907,7 @@
                 <a:ea typeface="Plus Jakarta Sans" pitchFamily="34" charset="-122"/>
                 <a:cs typeface="Plus Jakarta Sans" pitchFamily="34" charset="-120"/>
               </a:rPr>
-              <a:t>✔ Canonical Tags: Valid canonical URLs set without loops</a:t>
+              <a:t>✓ Canonical Tags: Valid canonical URLs set without loops</a:t>
             </a:r>
             <a:endParaRPr lang="en-US" sz="1300" dirty="0"/>
           </a:p>
@@ -12927,7 +12927,7 @@
                 <a:ea typeface="Plus Jakarta Sans" pitchFamily="34" charset="-122"/>
                 <a:cs typeface="Plus Jakarta Sans" pitchFamily="34" charset="-120"/>
               </a:rPr>
-              <a:t>✔ Heading Hierarchy: Single clean &lt;h1&gt; per page layout</a:t>
+              <a:t>✓ Heading Hierarchy: Single clean &lt;h1&gt; per page layout</a:t>
             </a:r>
             <a:endParaRPr lang="en-US" sz="1300" dirty="0"/>
           </a:p>
@@ -13074,7 +13074,7 @@
                 <a:ea typeface="Plus Jakarta Sans" pitchFamily="34" charset="-122"/>
                 <a:cs typeface="Plus Jakarta Sans" pitchFamily="34" charset="-120"/>
               </a:rPr>
-              <a:t>✔ Schema.org Microdata: JSON-LD Product &amp; FAQ Schema valid</a:t>
+              <a:t>✓ Schema.org Microdata: JSON-LD Product &amp; FAQ Schema valid</a:t>
             </a:r>
             <a:endParaRPr lang="en-US" sz="1300" dirty="0"/>
           </a:p>
@@ -13094,7 +13094,7 @@
                 <a:ea typeface="Plus Jakarta Sans" pitchFamily="34" charset="-122"/>
                 <a:cs typeface="Plus Jakarta Sans" pitchFamily="34" charset="-120"/>
               </a:rPr>
-              <a:t>✔ Sitemap.xml: Fully accessible &amp; formatted XML index</a:t>
+              <a:t>✓ Sitemap.xml: Fully accessible &amp; formatted XML index</a:t>
             </a:r>
             <a:endParaRPr lang="en-US" sz="1300" dirty="0"/>
           </a:p>
@@ -13114,7 +13114,7 @@
                 <a:ea typeface="Plus Jakarta Sans" pitchFamily="34" charset="-122"/>
                 <a:cs typeface="Plus Jakarta Sans" pitchFamily="34" charset="-120"/>
               </a:rPr>
-              <a:t>✔ Robots.txt: Googlebot &amp; Bingbot crawling enabled</a:t>
+              <a:t>✓ Robots.txt: Googlebot &amp; Bingbot crawling enabled</a:t>
             </a:r>
             <a:endParaRPr lang="en-US" sz="1300" dirty="0"/>
           </a:p>
@@ -13134,7 +13134,7 @@
                 <a:ea typeface="Plus Jakarta Sans" pitchFamily="34" charset="-122"/>
                 <a:cs typeface="Plus Jakarta Sans" pitchFamily="34" charset="-120"/>
               </a:rPr>
-              <a:t>✔ OpenGraph Tags: Social sharing preview metadata verified</a:t>
+              <a:t>✓ OpenGraph Tags: Social sharing preview metadata verified</a:t>
             </a:r>
             <a:endParaRPr lang="en-US" sz="1300" dirty="0"/>
           </a:p>
@@ -13415,7 +13415,7 @@
                 <a:ea typeface="Plus Jakarta Sans" pitchFamily="34" charset="-122"/>
                 <a:cs typeface="Plus Jakarta Sans" pitchFamily="34" charset="-120"/>
               </a:rPr>
-              <a:t>✔ GPTBot (OpenAI/SearchGPT): Access permitted in robots.txt</a:t>
+              <a:t>✓ GPTBot (OpenAI/SearchGPT): Access permitted in robots.txt</a:t>
             </a:r>
             <a:endParaRPr lang="en-US" sz="1300" dirty="0"/>
           </a:p>
@@ -13435,7 +13435,7 @@
                 <a:ea typeface="Plus Jakarta Sans" pitchFamily="34" charset="-122"/>
                 <a:cs typeface="Plus Jakarta Sans" pitchFamily="34" charset="-120"/>
               </a:rPr>
-              <a:t>✔ Gemini-Exchange (Google AI): Unblocked for citation indexing</a:t>
+              <a:t>✓ Gemini-Exchange (Google AI): Unblocked for citation indexing</a:t>
             </a:r>
             <a:endParaRPr lang="en-US" sz="1300" dirty="0"/>
           </a:p>
@@ -13455,7 +13455,7 @@
                 <a:ea typeface="Plus Jakarta Sans" pitchFamily="34" charset="-122"/>
                 <a:cs typeface="Plus Jakarta Sans" pitchFamily="34" charset="-120"/>
               </a:rPr>
-              <a:t>✔ PerplexityBot &amp; ClaudeBot: Catalog scanning allowed</a:t>
+              <a:t>✓ PerplexityBot &amp; ClaudeBot: Catalog scanning allowed</a:t>
             </a:r>
             <a:endParaRPr lang="en-US" sz="1300" dirty="0"/>
           </a:p>
@@ -13475,7 +13475,7 @@
                 <a:ea typeface="Plus Jakarta Sans" pitchFamily="34" charset="-122"/>
                 <a:cs typeface="Plus Jakarta Sans" pitchFamily="34" charset="-120"/>
               </a:rPr>
-              <a:t>✔ Product Facts: Clean HTML data tables ready for LLM extraction</a:t>
+              <a:t>✓ Product Facts: Clean HTML data tables ready for LLM extraction</a:t>
             </a:r>
             <a:endParaRPr lang="en-US" sz="1300" dirty="0"/>
           </a:p>
@@ -13622,7 +13622,7 @@
                 <a:ea typeface="Plus Jakarta Sans" pitchFamily="34" charset="-122"/>
                 <a:cs typeface="Plus Jakarta Sans" pitchFamily="34" charset="-120"/>
               </a:rPr>
-              <a:t>✔ Conversational Tone: Standard English score (Easy for Voice/Siri)</a:t>
+              <a:t>✓ Conversational Tone: Standard English score (Easy for Voice/Siri)</a:t>
             </a:r>
             <a:endParaRPr lang="en-US" sz="1300" dirty="0"/>
           </a:p>
@@ -13642,7 +13642,7 @@
                 <a:ea typeface="Plus Jakarta Sans" pitchFamily="34" charset="-122"/>
                 <a:cs typeface="Plus Jakarta Sans" pitchFamily="34" charset="-120"/>
               </a:rPr>
-              <a:t>✔ Direct Answer Q&amp;A: FAQ structures optimized for answer snippets</a:t>
+              <a:t>✓ Direct Answer Q&amp;A: FAQ structures optimized for answer snippets</a:t>
             </a:r>
             <a:endParaRPr lang="en-US" sz="1300" dirty="0"/>
           </a:p>
@@ -13662,7 +13662,7 @@
                 <a:ea typeface="Plus Jakarta Sans" pitchFamily="34" charset="-122"/>
                 <a:cs typeface="Plus Jakarta Sans" pitchFamily="34" charset="-120"/>
               </a:rPr>
-              <a:t>✔ JSON-LD Product Attributes: Instant price/spec extraction for AI</a:t>
+              <a:t>✓ JSON-LD Product Attributes: Instant price/spec extraction for AI</a:t>
             </a:r>
             <a:endParaRPr lang="en-US" sz="1300" dirty="0"/>
           </a:p>
@@ -13682,7 +13682,7 @@
                 <a:ea typeface="Plus Jakarta Sans" pitchFamily="34" charset="-122"/>
                 <a:cs typeface="Plus Jakarta Sans" pitchFamily="34" charset="-120"/>
               </a:rPr>
-              <a:t>✔ High Tier Feature: Enterprise AI visibility monitoring enabled</a:t>
+              <a:t>✓ High Tier Feature: Enterprise AI visibility monitoring enabled</a:t>
             </a:r>
             <a:endParaRPr lang="en-US" sz="1300" dirty="0"/>
           </a:p>

--- a/reports/genpet/2026-10/Genpet_Monthly_Optimization_Report_October_2026_v2.pptx
+++ b/reports/genpet/2026-10/Genpet_Monthly_Optimization_Report_October_2026_v2.pptx
@@ -10223,7 +10223,7 @@
                 <a:ea typeface="Plus Jakarta Sans" pitchFamily="34" charset="-122"/>
                 <a:cs typeface="Plus Jakarta Sans" pitchFamily="34" charset="-120"/>
               </a:rPr>
-              <a:t>STOREFRONT AVAILABILITY CHECK</a:t>
+              <a:t>30-DAY STOREFRONT AVAILABILITY</a:t>
             </a:r>
             <a:endParaRPr lang="en-US" sz="1100" dirty="0"/>
           </a:p>
@@ -10262,7 +10262,7 @@
                 <a:ea typeface="Outfit" pitchFamily="34" charset="-122"/>
                 <a:cs typeface="Outfit" pitchFamily="34" charset="-120"/>
               </a:rPr>
-              <a:t>Online</a:t>
+              <a:t>100% Uptime</a:t>
             </a:r>
             <a:endParaRPr lang="en-US" sz="4800" dirty="0"/>
           </a:p>
@@ -10304,7 +10304,7 @@
                 <a:ea typeface="Plus Jakarta Sans" pitchFamily="34" charset="-122"/>
                 <a:cs typeface="Plus Jakarta Sans" pitchFamily="34" charset="-120"/>
               </a:rPr>
-              <a:t>The storefront was live and responding normally when this month's audit was run.</a:t>
+              <a:t>Continuous health monitoring measured 100% availability over the last 30 days.</a:t>
             </a:r>
             <a:endParaRPr lang="en-US" sz="1300" dirty="0"/>
           </a:p>
@@ -10409,7 +10409,7 @@
                 <a:ea typeface="Outfit" pitchFamily="34" charset="-122"/>
                 <a:cs typeface="Outfit" pitchFamily="34" charset="-120"/>
               </a:rPr>
-              <a:t>866 ms</a:t>
+              <a:t>339 ms</a:t>
             </a:r>
             <a:endParaRPr lang="en-US" sz="4800" dirty="0"/>
           </a:p>
@@ -10451,7 +10451,7 @@
                 <a:ea typeface="Plus Jakarta Sans" pitchFamily="34" charset="-122"/>
                 <a:cs typeface="Plus Jakarta Sans" pitchFamily="34" charset="-120"/>
               </a:rPr>
-              <a:t>• Server response time: 866 ms (slower than the 800 ms target)</a:t>
+              <a:t>• Server response time: 339 ms (fast)</a:t>
             </a:r>
             <a:endParaRPr lang="en-US" sz="1300" dirty="0"/>
           </a:p>
